--- a/신뢰구간 임용고시 2019.pptx
+++ b/신뢰구간 임용고시 2019.pptx
@@ -167,10 +167,9 @@
           </a:lstStyle>
           <a:p>
             <a:r>
-              <a:rPr lang="en-US" smtClean="0"/>
+              <a:rPr lang="en-US"/>
               <a:t>Click to edit Master title style</a:t>
             </a:r>
-            <a:endParaRPr lang="en-US"/>
           </a:p>
         </p:txBody>
       </p:sp>
@@ -232,10 +231,9 @@
           </a:lstStyle>
           <a:p>
             <a:r>
-              <a:rPr lang="en-US" smtClean="0"/>
+              <a:rPr lang="en-US"/>
               <a:t>Click to edit Master subtitle style</a:t>
             </a:r>
-            <a:endParaRPr lang="en-US"/>
           </a:p>
         </p:txBody>
       </p:sp>
@@ -256,7 +254,7 @@
           <a:p>
             <a:fld id="{5B3AD1D6-AE87-C841-B3FD-7C9F7FCAE5AE}" type="datetimeFigureOut">
               <a:rPr lang="en-US" smtClean="0"/>
-              <a:t>12/15/19</a:t>
+              <a:t>12/22/19</a:t>
             </a:fld>
             <a:endParaRPr lang="en-US"/>
           </a:p>
@@ -350,10 +348,9 @@
           <a:lstStyle/>
           <a:p>
             <a:r>
-              <a:rPr lang="en-US" smtClean="0"/>
+              <a:rPr lang="en-US"/>
               <a:t>Click to edit Master title style</a:t>
             </a:r>
-            <a:endParaRPr lang="en-US"/>
           </a:p>
         </p:txBody>
       </p:sp>
@@ -374,38 +371,37 @@
           <a:p>
             <a:pPr lvl="0"/>
             <a:r>
-              <a:rPr lang="en-US" smtClean="0"/>
+              <a:rPr lang="en-US"/>
               <a:t>Click to edit Master text styles</a:t>
             </a:r>
           </a:p>
           <a:p>
             <a:pPr lvl="1"/>
             <a:r>
-              <a:rPr lang="en-US" smtClean="0"/>
+              <a:rPr lang="en-US"/>
               <a:t>Second level</a:t>
             </a:r>
           </a:p>
           <a:p>
             <a:pPr lvl="2"/>
             <a:r>
-              <a:rPr lang="en-US" smtClean="0"/>
+              <a:rPr lang="en-US"/>
               <a:t>Third level</a:t>
             </a:r>
           </a:p>
           <a:p>
             <a:pPr lvl="3"/>
             <a:r>
-              <a:rPr lang="en-US" smtClean="0"/>
+              <a:rPr lang="en-US"/>
               <a:t>Fourth level</a:t>
             </a:r>
           </a:p>
           <a:p>
             <a:pPr lvl="4"/>
             <a:r>
-              <a:rPr lang="en-US" smtClean="0"/>
+              <a:rPr lang="en-US"/>
               <a:t>Fifth level</a:t>
             </a:r>
-            <a:endParaRPr lang="en-US"/>
           </a:p>
         </p:txBody>
       </p:sp>
@@ -426,7 +422,7 @@
           <a:p>
             <a:fld id="{5B3AD1D6-AE87-C841-B3FD-7C9F7FCAE5AE}" type="datetimeFigureOut">
               <a:rPr lang="en-US" smtClean="0"/>
-              <a:t>12/15/19</a:t>
+              <a:t>12/22/19</a:t>
             </a:fld>
             <a:endParaRPr lang="en-US"/>
           </a:p>
@@ -525,10 +521,9 @@
           <a:lstStyle/>
           <a:p>
             <a:r>
-              <a:rPr lang="en-US" smtClean="0"/>
+              <a:rPr lang="en-US"/>
               <a:t>Click to edit Master title style</a:t>
             </a:r>
-            <a:endParaRPr lang="en-US"/>
           </a:p>
         </p:txBody>
       </p:sp>
@@ -554,38 +549,37 @@
           <a:p>
             <a:pPr lvl="0"/>
             <a:r>
-              <a:rPr lang="en-US" smtClean="0"/>
+              <a:rPr lang="en-US"/>
               <a:t>Click to edit Master text styles</a:t>
             </a:r>
           </a:p>
           <a:p>
             <a:pPr lvl="1"/>
             <a:r>
-              <a:rPr lang="en-US" smtClean="0"/>
+              <a:rPr lang="en-US"/>
               <a:t>Second level</a:t>
             </a:r>
           </a:p>
           <a:p>
             <a:pPr lvl="2"/>
             <a:r>
-              <a:rPr lang="en-US" smtClean="0"/>
+              <a:rPr lang="en-US"/>
               <a:t>Third level</a:t>
             </a:r>
           </a:p>
           <a:p>
             <a:pPr lvl="3"/>
             <a:r>
-              <a:rPr lang="en-US" smtClean="0"/>
+              <a:rPr lang="en-US"/>
               <a:t>Fourth level</a:t>
             </a:r>
           </a:p>
           <a:p>
             <a:pPr lvl="4"/>
             <a:r>
-              <a:rPr lang="en-US" smtClean="0"/>
+              <a:rPr lang="en-US"/>
               <a:t>Fifth level</a:t>
             </a:r>
-            <a:endParaRPr lang="en-US"/>
           </a:p>
         </p:txBody>
       </p:sp>
@@ -606,7 +600,7 @@
           <a:p>
             <a:fld id="{5B3AD1D6-AE87-C841-B3FD-7C9F7FCAE5AE}" type="datetimeFigureOut">
               <a:rPr lang="en-US" smtClean="0"/>
-              <a:t>12/15/19</a:t>
+              <a:t>12/22/19</a:t>
             </a:fld>
             <a:endParaRPr lang="en-US"/>
           </a:p>
@@ -700,10 +694,9 @@
           <a:lstStyle/>
           <a:p>
             <a:r>
-              <a:rPr lang="en-US" smtClean="0"/>
+              <a:rPr lang="en-US"/>
               <a:t>Click to edit Master title style</a:t>
             </a:r>
-            <a:endParaRPr lang="en-US"/>
           </a:p>
         </p:txBody>
       </p:sp>
@@ -724,38 +717,37 @@
           <a:p>
             <a:pPr lvl="0"/>
             <a:r>
-              <a:rPr lang="en-US" smtClean="0"/>
+              <a:rPr lang="en-US"/>
               <a:t>Click to edit Master text styles</a:t>
             </a:r>
           </a:p>
           <a:p>
             <a:pPr lvl="1"/>
             <a:r>
-              <a:rPr lang="en-US" smtClean="0"/>
+              <a:rPr lang="en-US"/>
               <a:t>Second level</a:t>
             </a:r>
           </a:p>
           <a:p>
             <a:pPr lvl="2"/>
             <a:r>
-              <a:rPr lang="en-US" smtClean="0"/>
+              <a:rPr lang="en-US"/>
               <a:t>Third level</a:t>
             </a:r>
           </a:p>
           <a:p>
             <a:pPr lvl="3"/>
             <a:r>
-              <a:rPr lang="en-US" smtClean="0"/>
+              <a:rPr lang="en-US"/>
               <a:t>Fourth level</a:t>
             </a:r>
           </a:p>
           <a:p>
             <a:pPr lvl="4"/>
             <a:r>
-              <a:rPr lang="en-US" smtClean="0"/>
+              <a:rPr lang="en-US"/>
               <a:t>Fifth level</a:t>
             </a:r>
-            <a:endParaRPr lang="en-US"/>
           </a:p>
         </p:txBody>
       </p:sp>
@@ -776,7 +768,7 @@
           <a:p>
             <a:fld id="{5B3AD1D6-AE87-C841-B3FD-7C9F7FCAE5AE}" type="datetimeFigureOut">
               <a:rPr lang="en-US" smtClean="0"/>
-              <a:t>12/15/19</a:t>
+              <a:t>12/22/19</a:t>
             </a:fld>
             <a:endParaRPr lang="en-US"/>
           </a:p>
@@ -879,10 +871,9 @@
           </a:lstStyle>
           <a:p>
             <a:r>
-              <a:rPr lang="en-US" smtClean="0"/>
+              <a:rPr lang="en-US"/>
               <a:t>Click to edit Master title style</a:t>
             </a:r>
-            <a:endParaRPr lang="en-US"/>
           </a:p>
         </p:txBody>
       </p:sp>
@@ -999,7 +990,7 @@
           <a:p>
             <a:pPr lvl="0"/>
             <a:r>
-              <a:rPr lang="en-US" smtClean="0"/>
+              <a:rPr lang="en-US"/>
               <a:t>Click to edit Master text styles</a:t>
             </a:r>
           </a:p>
@@ -1022,7 +1013,7 @@
           <a:p>
             <a:fld id="{5B3AD1D6-AE87-C841-B3FD-7C9F7FCAE5AE}" type="datetimeFigureOut">
               <a:rPr lang="en-US" smtClean="0"/>
-              <a:t>12/15/19</a:t>
+              <a:t>12/22/19</a:t>
             </a:fld>
             <a:endParaRPr lang="en-US"/>
           </a:p>
@@ -1116,10 +1107,9 @@
           <a:lstStyle/>
           <a:p>
             <a:r>
-              <a:rPr lang="en-US" smtClean="0"/>
+              <a:rPr lang="en-US"/>
               <a:t>Click to edit Master title style</a:t>
             </a:r>
-            <a:endParaRPr lang="en-US"/>
           </a:p>
         </p:txBody>
       </p:sp>
@@ -1145,38 +1135,37 @@
           <a:p>
             <a:pPr lvl="0"/>
             <a:r>
-              <a:rPr lang="en-US" smtClean="0"/>
+              <a:rPr lang="en-US"/>
               <a:t>Click to edit Master text styles</a:t>
             </a:r>
           </a:p>
           <a:p>
             <a:pPr lvl="1"/>
             <a:r>
-              <a:rPr lang="en-US" smtClean="0"/>
+              <a:rPr lang="en-US"/>
               <a:t>Second level</a:t>
             </a:r>
           </a:p>
           <a:p>
             <a:pPr lvl="2"/>
             <a:r>
-              <a:rPr lang="en-US" smtClean="0"/>
+              <a:rPr lang="en-US"/>
               <a:t>Third level</a:t>
             </a:r>
           </a:p>
           <a:p>
             <a:pPr lvl="3"/>
             <a:r>
-              <a:rPr lang="en-US" smtClean="0"/>
+              <a:rPr lang="en-US"/>
               <a:t>Fourth level</a:t>
             </a:r>
           </a:p>
           <a:p>
             <a:pPr lvl="4"/>
             <a:r>
-              <a:rPr lang="en-US" smtClean="0"/>
+              <a:rPr lang="en-US"/>
               <a:t>Fifth level</a:t>
             </a:r>
-            <a:endParaRPr lang="en-US"/>
           </a:p>
         </p:txBody>
       </p:sp>
@@ -1202,38 +1191,37 @@
           <a:p>
             <a:pPr lvl="0"/>
             <a:r>
-              <a:rPr lang="en-US" smtClean="0"/>
+              <a:rPr lang="en-US"/>
               <a:t>Click to edit Master text styles</a:t>
             </a:r>
           </a:p>
           <a:p>
             <a:pPr lvl="1"/>
             <a:r>
-              <a:rPr lang="en-US" smtClean="0"/>
+              <a:rPr lang="en-US"/>
               <a:t>Second level</a:t>
             </a:r>
           </a:p>
           <a:p>
             <a:pPr lvl="2"/>
             <a:r>
-              <a:rPr lang="en-US" smtClean="0"/>
+              <a:rPr lang="en-US"/>
               <a:t>Third level</a:t>
             </a:r>
           </a:p>
           <a:p>
             <a:pPr lvl="3"/>
             <a:r>
-              <a:rPr lang="en-US" smtClean="0"/>
+              <a:rPr lang="en-US"/>
               <a:t>Fourth level</a:t>
             </a:r>
           </a:p>
           <a:p>
             <a:pPr lvl="4"/>
             <a:r>
-              <a:rPr lang="en-US" smtClean="0"/>
+              <a:rPr lang="en-US"/>
               <a:t>Fifth level</a:t>
             </a:r>
-            <a:endParaRPr lang="en-US"/>
           </a:p>
         </p:txBody>
       </p:sp>
@@ -1254,7 +1242,7 @@
           <a:p>
             <a:fld id="{5B3AD1D6-AE87-C841-B3FD-7C9F7FCAE5AE}" type="datetimeFigureOut">
               <a:rPr lang="en-US" smtClean="0"/>
-              <a:t>12/15/19</a:t>
+              <a:t>12/22/19</a:t>
             </a:fld>
             <a:endParaRPr lang="en-US"/>
           </a:p>
@@ -1353,10 +1341,9 @@
           <a:lstStyle/>
           <a:p>
             <a:r>
-              <a:rPr lang="en-US" smtClean="0"/>
+              <a:rPr lang="en-US"/>
               <a:t>Click to edit Master title style</a:t>
             </a:r>
-            <a:endParaRPr lang="en-US"/>
           </a:p>
         </p:txBody>
       </p:sp>
@@ -1419,7 +1406,7 @@
           <a:p>
             <a:pPr lvl="0"/>
             <a:r>
-              <a:rPr lang="en-US" smtClean="0"/>
+              <a:rPr lang="en-US"/>
               <a:t>Click to edit Master text styles</a:t>
             </a:r>
           </a:p>
@@ -1447,38 +1434,37 @@
           <a:p>
             <a:pPr lvl="0"/>
             <a:r>
-              <a:rPr lang="en-US" smtClean="0"/>
+              <a:rPr lang="en-US"/>
               <a:t>Click to edit Master text styles</a:t>
             </a:r>
           </a:p>
           <a:p>
             <a:pPr lvl="1"/>
             <a:r>
-              <a:rPr lang="en-US" smtClean="0"/>
+              <a:rPr lang="en-US"/>
               <a:t>Second level</a:t>
             </a:r>
           </a:p>
           <a:p>
             <a:pPr lvl="2"/>
             <a:r>
-              <a:rPr lang="en-US" smtClean="0"/>
+              <a:rPr lang="en-US"/>
               <a:t>Third level</a:t>
             </a:r>
           </a:p>
           <a:p>
             <a:pPr lvl="3"/>
             <a:r>
-              <a:rPr lang="en-US" smtClean="0"/>
+              <a:rPr lang="en-US"/>
               <a:t>Fourth level</a:t>
             </a:r>
           </a:p>
           <a:p>
             <a:pPr lvl="4"/>
             <a:r>
-              <a:rPr lang="en-US" smtClean="0"/>
+              <a:rPr lang="en-US"/>
               <a:t>Fifth level</a:t>
             </a:r>
-            <a:endParaRPr lang="en-US"/>
           </a:p>
         </p:txBody>
       </p:sp>
@@ -1541,7 +1527,7 @@
           <a:p>
             <a:pPr lvl="0"/>
             <a:r>
-              <a:rPr lang="en-US" smtClean="0"/>
+              <a:rPr lang="en-US"/>
               <a:t>Click to edit Master text styles</a:t>
             </a:r>
           </a:p>
@@ -1569,38 +1555,37 @@
           <a:p>
             <a:pPr lvl="0"/>
             <a:r>
-              <a:rPr lang="en-US" smtClean="0"/>
+              <a:rPr lang="en-US"/>
               <a:t>Click to edit Master text styles</a:t>
             </a:r>
           </a:p>
           <a:p>
             <a:pPr lvl="1"/>
             <a:r>
-              <a:rPr lang="en-US" smtClean="0"/>
+              <a:rPr lang="en-US"/>
               <a:t>Second level</a:t>
             </a:r>
           </a:p>
           <a:p>
             <a:pPr lvl="2"/>
             <a:r>
-              <a:rPr lang="en-US" smtClean="0"/>
+              <a:rPr lang="en-US"/>
               <a:t>Third level</a:t>
             </a:r>
           </a:p>
           <a:p>
             <a:pPr lvl="3"/>
             <a:r>
-              <a:rPr lang="en-US" smtClean="0"/>
+              <a:rPr lang="en-US"/>
               <a:t>Fourth level</a:t>
             </a:r>
           </a:p>
           <a:p>
             <a:pPr lvl="4"/>
             <a:r>
-              <a:rPr lang="en-US" smtClean="0"/>
+              <a:rPr lang="en-US"/>
               <a:t>Fifth level</a:t>
             </a:r>
-            <a:endParaRPr lang="en-US"/>
           </a:p>
         </p:txBody>
       </p:sp>
@@ -1621,7 +1606,7 @@
           <a:p>
             <a:fld id="{5B3AD1D6-AE87-C841-B3FD-7C9F7FCAE5AE}" type="datetimeFigureOut">
               <a:rPr lang="en-US" smtClean="0"/>
-              <a:t>12/15/19</a:t>
+              <a:t>12/22/19</a:t>
             </a:fld>
             <a:endParaRPr lang="en-US"/>
           </a:p>
@@ -1715,10 +1700,9 @@
           <a:lstStyle/>
           <a:p>
             <a:r>
-              <a:rPr lang="en-US" smtClean="0"/>
+              <a:rPr lang="en-US"/>
               <a:t>Click to edit Master title style</a:t>
             </a:r>
-            <a:endParaRPr lang="en-US"/>
           </a:p>
         </p:txBody>
       </p:sp>
@@ -1739,7 +1723,7 @@
           <a:p>
             <a:fld id="{5B3AD1D6-AE87-C841-B3FD-7C9F7FCAE5AE}" type="datetimeFigureOut">
               <a:rPr lang="en-US" smtClean="0"/>
-              <a:t>12/15/19</a:t>
+              <a:t>12/22/19</a:t>
             </a:fld>
             <a:endParaRPr lang="en-US"/>
           </a:p>
@@ -1834,7 +1818,7 @@
           <a:p>
             <a:fld id="{5B3AD1D6-AE87-C841-B3FD-7C9F7FCAE5AE}" type="datetimeFigureOut">
               <a:rPr lang="en-US" smtClean="0"/>
-              <a:t>12/15/19</a:t>
+              <a:t>12/22/19</a:t>
             </a:fld>
             <a:endParaRPr lang="en-US"/>
           </a:p>
@@ -1937,10 +1921,9 @@
           </a:lstStyle>
           <a:p>
             <a:r>
-              <a:rPr lang="en-US" smtClean="0"/>
+              <a:rPr lang="en-US"/>
               <a:t>Click to edit Master title style</a:t>
             </a:r>
-            <a:endParaRPr lang="en-US"/>
           </a:p>
         </p:txBody>
       </p:sp>
@@ -1994,38 +1977,37 @@
           <a:p>
             <a:pPr lvl="0"/>
             <a:r>
-              <a:rPr lang="en-US" smtClean="0"/>
+              <a:rPr lang="en-US"/>
               <a:t>Click to edit Master text styles</a:t>
             </a:r>
           </a:p>
           <a:p>
             <a:pPr lvl="1"/>
             <a:r>
-              <a:rPr lang="en-US" smtClean="0"/>
+              <a:rPr lang="en-US"/>
               <a:t>Second level</a:t>
             </a:r>
           </a:p>
           <a:p>
             <a:pPr lvl="2"/>
             <a:r>
-              <a:rPr lang="en-US" smtClean="0"/>
+              <a:rPr lang="en-US"/>
               <a:t>Third level</a:t>
             </a:r>
           </a:p>
           <a:p>
             <a:pPr lvl="3"/>
             <a:r>
-              <a:rPr lang="en-US" smtClean="0"/>
+              <a:rPr lang="en-US"/>
               <a:t>Fourth level</a:t>
             </a:r>
           </a:p>
           <a:p>
             <a:pPr lvl="4"/>
             <a:r>
-              <a:rPr lang="en-US" smtClean="0"/>
+              <a:rPr lang="en-US"/>
               <a:t>Fifth level</a:t>
             </a:r>
-            <a:endParaRPr lang="en-US"/>
           </a:p>
         </p:txBody>
       </p:sp>
@@ -2088,7 +2070,7 @@
           <a:p>
             <a:pPr lvl="0"/>
             <a:r>
-              <a:rPr lang="en-US" smtClean="0"/>
+              <a:rPr lang="en-US"/>
               <a:t>Click to edit Master text styles</a:t>
             </a:r>
           </a:p>
@@ -2111,7 +2093,7 @@
           <a:p>
             <a:fld id="{5B3AD1D6-AE87-C841-B3FD-7C9F7FCAE5AE}" type="datetimeFigureOut">
               <a:rPr lang="en-US" smtClean="0"/>
-              <a:t>12/15/19</a:t>
+              <a:t>12/22/19</a:t>
             </a:fld>
             <a:endParaRPr lang="en-US"/>
           </a:p>
@@ -2214,10 +2196,9 @@
           </a:lstStyle>
           <a:p>
             <a:r>
-              <a:rPr lang="en-US" smtClean="0"/>
+              <a:rPr lang="en-US"/>
               <a:t>Click to edit Master title style</a:t>
             </a:r>
-            <a:endParaRPr lang="en-US"/>
           </a:p>
         </p:txBody>
       </p:sp>
@@ -2341,7 +2322,7 @@
           <a:p>
             <a:pPr lvl="0"/>
             <a:r>
-              <a:rPr lang="en-US" smtClean="0"/>
+              <a:rPr lang="en-US"/>
               <a:t>Click to edit Master text styles</a:t>
             </a:r>
           </a:p>
@@ -2364,7 +2345,7 @@
           <a:p>
             <a:fld id="{5B3AD1D6-AE87-C841-B3FD-7C9F7FCAE5AE}" type="datetimeFigureOut">
               <a:rPr lang="en-US" smtClean="0"/>
-              <a:t>12/15/19</a:t>
+              <a:t>12/22/19</a:t>
             </a:fld>
             <a:endParaRPr lang="en-US"/>
           </a:p>
@@ -2473,10 +2454,9 @@
           <a:lstStyle/>
           <a:p>
             <a:r>
-              <a:rPr lang="en-US" smtClean="0"/>
+              <a:rPr lang="en-US"/>
               <a:t>Click to edit Master title style</a:t>
             </a:r>
-            <a:endParaRPr lang="en-US"/>
           </a:p>
         </p:txBody>
       </p:sp>
@@ -2507,38 +2487,37 @@
           <a:p>
             <a:pPr lvl="0"/>
             <a:r>
-              <a:rPr lang="en-US" smtClean="0"/>
+              <a:rPr lang="en-US"/>
               <a:t>Click to edit Master text styles</a:t>
             </a:r>
           </a:p>
           <a:p>
             <a:pPr lvl="1"/>
             <a:r>
-              <a:rPr lang="en-US" smtClean="0"/>
+              <a:rPr lang="en-US"/>
               <a:t>Second level</a:t>
             </a:r>
           </a:p>
           <a:p>
             <a:pPr lvl="2"/>
             <a:r>
-              <a:rPr lang="en-US" smtClean="0"/>
+              <a:rPr lang="en-US"/>
               <a:t>Third level</a:t>
             </a:r>
           </a:p>
           <a:p>
             <a:pPr lvl="3"/>
             <a:r>
-              <a:rPr lang="en-US" smtClean="0"/>
+              <a:rPr lang="en-US"/>
               <a:t>Fourth level</a:t>
             </a:r>
           </a:p>
           <a:p>
             <a:pPr lvl="4"/>
             <a:r>
-              <a:rPr lang="en-US" smtClean="0"/>
+              <a:rPr lang="en-US"/>
               <a:t>Fifth level</a:t>
             </a:r>
-            <a:endParaRPr lang="en-US"/>
           </a:p>
         </p:txBody>
       </p:sp>
@@ -2577,7 +2556,7 @@
           <a:p>
             <a:fld id="{5B3AD1D6-AE87-C841-B3FD-7C9F7FCAE5AE}" type="datetimeFigureOut">
               <a:rPr lang="en-US" smtClean="0"/>
-              <a:t>12/15/19</a:t>
+              <a:t>12/22/19</a:t>
             </a:fld>
             <a:endParaRPr lang="en-US"/>
           </a:p>
@@ -3004,29 +2983,6 @@
           </a:bodyPr>
           <a:lstStyle/>
           <a:p>
-            <a:r>
-              <a:rPr lang="en-US" sz="4000" dirty="0" smtClean="0">
-                <a:latin typeface="Arial Black" charset="0"/>
-                <a:ea typeface="Arial Black" charset="0"/>
-                <a:cs typeface="Arial Black" charset="0"/>
-              </a:rPr>
-              <a:t/>
-            </a:r>
-            <a:br>
-              <a:rPr lang="en-US" sz="4000" dirty="0" smtClean="0">
-                <a:latin typeface="Arial Black" charset="0"/>
-                <a:ea typeface="Arial Black" charset="0"/>
-                <a:cs typeface="Arial Black" charset="0"/>
-              </a:rPr>
-            </a:br>
-            <a:r>
-              <a:rPr lang="en-US" sz="4000" dirty="0">
-                <a:latin typeface="Arial Black" charset="0"/>
-                <a:ea typeface="Arial Black" charset="0"/>
-                <a:cs typeface="Arial Black" charset="0"/>
-              </a:rPr>
-              <a:t/>
-            </a:r>
             <a:br>
               <a:rPr lang="en-US" sz="4000" dirty="0">
                 <a:latin typeface="Arial Black" charset="0"/>
@@ -3034,29 +2990,6 @@
                 <a:cs typeface="Arial Black" charset="0"/>
               </a:rPr>
             </a:br>
-            <a:r>
-              <a:rPr lang="en-US" sz="4000" dirty="0" smtClean="0">
-                <a:latin typeface="Arial Black" charset="0"/>
-                <a:ea typeface="Arial Black" charset="0"/>
-                <a:cs typeface="Arial Black" charset="0"/>
-              </a:rPr>
-              <a:t/>
-            </a:r>
-            <a:br>
-              <a:rPr lang="en-US" sz="4000" dirty="0" smtClean="0">
-                <a:latin typeface="Arial Black" charset="0"/>
-                <a:ea typeface="Arial Black" charset="0"/>
-                <a:cs typeface="Arial Black" charset="0"/>
-              </a:rPr>
-            </a:br>
-            <a:r>
-              <a:rPr lang="en-US" sz="4000" dirty="0">
-                <a:latin typeface="Arial Black" charset="0"/>
-                <a:ea typeface="Arial Black" charset="0"/>
-                <a:cs typeface="Arial Black" charset="0"/>
-              </a:rPr>
-              <a:t/>
-            </a:r>
             <a:br>
               <a:rPr lang="en-US" sz="4000" dirty="0">
                 <a:latin typeface="Arial Black" charset="0"/>
@@ -3064,29 +2997,6 @@
                 <a:cs typeface="Arial Black" charset="0"/>
               </a:rPr>
             </a:br>
-            <a:r>
-              <a:rPr lang="en-US" sz="4000" dirty="0" smtClean="0">
-                <a:latin typeface="Arial Black" charset="0"/>
-                <a:ea typeface="Arial Black" charset="0"/>
-                <a:cs typeface="Arial Black" charset="0"/>
-              </a:rPr>
-              <a:t/>
-            </a:r>
-            <a:br>
-              <a:rPr lang="en-US" sz="4000" dirty="0" smtClean="0">
-                <a:latin typeface="Arial Black" charset="0"/>
-                <a:ea typeface="Arial Black" charset="0"/>
-                <a:cs typeface="Arial Black" charset="0"/>
-              </a:rPr>
-            </a:br>
-            <a:r>
-              <a:rPr lang="en-US" sz="4000" dirty="0">
-                <a:latin typeface="Arial Black" charset="0"/>
-                <a:ea typeface="Arial Black" charset="0"/>
-                <a:cs typeface="Arial Black" charset="0"/>
-              </a:rPr>
-              <a:t/>
-            </a:r>
             <a:br>
               <a:rPr lang="en-US" sz="4000" dirty="0">
                 <a:latin typeface="Arial Black" charset="0"/>
@@ -3094,29 +3004,6 @@
                 <a:cs typeface="Arial Black" charset="0"/>
               </a:rPr>
             </a:br>
-            <a:r>
-              <a:rPr lang="en-US" sz="4000" dirty="0" smtClean="0">
-                <a:latin typeface="Arial Black" charset="0"/>
-                <a:ea typeface="Arial Black" charset="0"/>
-                <a:cs typeface="Arial Black" charset="0"/>
-              </a:rPr>
-              <a:t/>
-            </a:r>
-            <a:br>
-              <a:rPr lang="en-US" sz="4000" dirty="0" smtClean="0">
-                <a:latin typeface="Arial Black" charset="0"/>
-                <a:ea typeface="Arial Black" charset="0"/>
-                <a:cs typeface="Arial Black" charset="0"/>
-              </a:rPr>
-            </a:br>
-            <a:r>
-              <a:rPr lang="en-US" sz="4000" dirty="0">
-                <a:latin typeface="Arial Black" charset="0"/>
-                <a:ea typeface="Arial Black" charset="0"/>
-                <a:cs typeface="Arial Black" charset="0"/>
-              </a:rPr>
-              <a:t/>
-            </a:r>
             <a:br>
               <a:rPr lang="en-US" sz="4000" dirty="0">
                 <a:latin typeface="Arial Black" charset="0"/>
@@ -3124,29 +3011,6 @@
                 <a:cs typeface="Arial Black" charset="0"/>
               </a:rPr>
             </a:br>
-            <a:r>
-              <a:rPr lang="en-US" sz="4000" dirty="0" smtClean="0">
-                <a:latin typeface="Arial Black" charset="0"/>
-                <a:ea typeface="Arial Black" charset="0"/>
-                <a:cs typeface="Arial Black" charset="0"/>
-              </a:rPr>
-              <a:t/>
-            </a:r>
-            <a:br>
-              <a:rPr lang="en-US" sz="4000" dirty="0" smtClean="0">
-                <a:latin typeface="Arial Black" charset="0"/>
-                <a:ea typeface="Arial Black" charset="0"/>
-                <a:cs typeface="Arial Black" charset="0"/>
-              </a:rPr>
-            </a:br>
-            <a:r>
-              <a:rPr lang="en-US" sz="4000" dirty="0">
-                <a:latin typeface="Arial Black" charset="0"/>
-                <a:ea typeface="Arial Black" charset="0"/>
-                <a:cs typeface="Arial Black" charset="0"/>
-              </a:rPr>
-              <a:t/>
-            </a:r>
             <a:br>
               <a:rPr lang="en-US" sz="4000" dirty="0">
                 <a:latin typeface="Arial Black" charset="0"/>
@@ -3154,23 +3018,50 @@
                 <a:cs typeface="Arial Black" charset="0"/>
               </a:rPr>
             </a:br>
-            <a:r>
-              <a:rPr lang="en-US" sz="4000" dirty="0" smtClean="0">
-                <a:latin typeface="Arial Black" charset="0"/>
-                <a:ea typeface="Arial Black" charset="0"/>
-                <a:cs typeface="Arial Black" charset="0"/>
-              </a:rPr>
-              <a:t/>
-            </a:r>
             <a:br>
-              <a:rPr lang="en-US" sz="4000" dirty="0" smtClean="0">
+              <a:rPr lang="en-US" sz="4000" dirty="0">
                 <a:latin typeface="Arial Black" charset="0"/>
                 <a:ea typeface="Arial Black" charset="0"/>
                 <a:cs typeface="Arial Black" charset="0"/>
               </a:rPr>
             </a:br>
-            <a:r>
-              <a:rPr lang="en-US" sz="6700" dirty="0" smtClean="0">
+            <a:br>
+              <a:rPr lang="en-US" sz="4000" dirty="0">
+                <a:latin typeface="Arial Black" charset="0"/>
+                <a:ea typeface="Arial Black" charset="0"/>
+                <a:cs typeface="Arial Black" charset="0"/>
+              </a:rPr>
+            </a:br>
+            <a:br>
+              <a:rPr lang="en-US" sz="4000" dirty="0">
+                <a:latin typeface="Arial Black" charset="0"/>
+                <a:ea typeface="Arial Black" charset="0"/>
+                <a:cs typeface="Arial Black" charset="0"/>
+              </a:rPr>
+            </a:br>
+            <a:br>
+              <a:rPr lang="en-US" sz="4000" dirty="0">
+                <a:latin typeface="Arial Black" charset="0"/>
+                <a:ea typeface="Arial Black" charset="0"/>
+                <a:cs typeface="Arial Black" charset="0"/>
+              </a:rPr>
+            </a:br>
+            <a:br>
+              <a:rPr lang="en-US" sz="4000" dirty="0">
+                <a:latin typeface="Arial Black" charset="0"/>
+                <a:ea typeface="Arial Black" charset="0"/>
+                <a:cs typeface="Arial Black" charset="0"/>
+              </a:rPr>
+            </a:br>
+            <a:br>
+              <a:rPr lang="en-US" sz="4000" dirty="0">
+                <a:latin typeface="Arial Black" charset="0"/>
+                <a:ea typeface="Arial Black" charset="0"/>
+                <a:cs typeface="Arial Black" charset="0"/>
+              </a:rPr>
+            </a:br>
+            <a:r>
+              <a:rPr lang="en-US" sz="6700" dirty="0">
                 <a:latin typeface="Arial Black" charset="0"/>
                 <a:ea typeface="Arial Black" charset="0"/>
                 <a:cs typeface="Arial Black" charset="0"/>
@@ -3178,14 +3069,14 @@
               <a:t>Problems</a:t>
             </a:r>
             <a:br>
-              <a:rPr lang="en-US" sz="6700" dirty="0" smtClean="0">
+              <a:rPr lang="en-US" sz="6700" dirty="0">
                 <a:latin typeface="Arial Black" charset="0"/>
                 <a:ea typeface="Arial Black" charset="0"/>
                 <a:cs typeface="Arial Black" charset="0"/>
               </a:rPr>
             </a:br>
             <a:r>
-              <a:rPr lang="en-US" sz="6700" dirty="0" smtClean="0">
+              <a:rPr lang="en-US" sz="6700" dirty="0">
                 <a:latin typeface="Arial Black" charset="0"/>
                 <a:ea typeface="Arial Black" charset="0"/>
                 <a:cs typeface="Arial Black" charset="0"/>
@@ -3193,14 +3084,14 @@
               <a:t>on</a:t>
             </a:r>
             <a:br>
-              <a:rPr lang="en-US" sz="6700" dirty="0" smtClean="0">
+              <a:rPr lang="en-US" sz="6700" dirty="0">
                 <a:latin typeface="Arial Black" charset="0"/>
                 <a:ea typeface="Arial Black" charset="0"/>
                 <a:cs typeface="Arial Black" charset="0"/>
               </a:rPr>
             </a:br>
             <a:r>
-              <a:rPr lang="en-US" sz="6700" dirty="0" smtClean="0">
+              <a:rPr lang="en-US" sz="6700">
                 <a:latin typeface="Arial Black" charset="0"/>
                 <a:ea typeface="Arial Black" charset="0"/>
                 <a:cs typeface="Arial Black" charset="0"/>
@@ -3208,22 +3099,22 @@
               <a:t>Confidence Interval</a:t>
             </a:r>
             <a:br>
-              <a:rPr lang="en-US" sz="6700" dirty="0" smtClean="0">
+              <a:rPr lang="en-US" sz="6700">
                 <a:latin typeface="Arial Black" charset="0"/>
                 <a:ea typeface="Arial Black" charset="0"/>
                 <a:cs typeface="Arial Black" charset="0"/>
               </a:rPr>
             </a:br>
             <a:r>
-              <a:rPr lang="en-US" sz="6700" dirty="0" smtClean="0">
+              <a:rPr lang="en-US" sz="6700">
                 <a:latin typeface="Arial Black" charset="0"/>
                 <a:ea typeface="Arial Black" charset="0"/>
                 <a:cs typeface="Arial Black" charset="0"/>
               </a:rPr>
-              <a:t/>
+              <a:t>2019</a:t>
             </a:r>
             <a:br>
-              <a:rPr lang="en-US" sz="6700" dirty="0" smtClean="0">
+              <a:rPr lang="en-US" sz="6700" dirty="0">
                 <a:latin typeface="Arial Black" charset="0"/>
                 <a:ea typeface="Arial Black" charset="0"/>
                 <a:cs typeface="Arial Black" charset="0"/>
@@ -3675,8 +3566,8 @@
         </p:blipFill>
         <p:spPr>
           <a:xfrm>
-            <a:off x="401319" y="3312160"/>
-            <a:ext cx="9575800" cy="2159000"/>
+            <a:off x="401319" y="3238052"/>
+            <a:ext cx="9575800" cy="2233108"/>
           </a:xfrm>
           <a:prstGeom prst="rect">
             <a:avLst/>
@@ -3791,18 +3682,13 @@
           <a:lstStyle/>
           <a:p>
             <a:r>
-              <a:rPr lang="en-US" sz="4000" dirty="0" smtClean="0">
+              <a:rPr lang="en-US" sz="4000" dirty="0">
                 <a:latin typeface="Arial Black" charset="0"/>
                 <a:ea typeface="Arial Black" charset="0"/>
                 <a:cs typeface="Arial Black" charset="0"/>
               </a:rPr>
               <a:t>Reference</a:t>
             </a:r>
-            <a:endParaRPr lang="en-US" sz="4000" dirty="0">
-              <a:latin typeface="Arial Black" charset="0"/>
-              <a:ea typeface="Arial Black" charset="0"/>
-              <a:cs typeface="Arial Black" charset="0"/>
-            </a:endParaRPr>
           </a:p>
         </p:txBody>
       </p:sp>
@@ -3821,7 +3707,7 @@
           <a:bodyPr/>
           <a:lstStyle/>
           <a:p>
-            <a:endParaRPr lang="en-US" sz="2000" dirty="0" smtClean="0">
+            <a:endParaRPr lang="en-US" sz="2000" dirty="0">
               <a:latin typeface="Arial Black" charset="0"/>
               <a:ea typeface="Arial Black" charset="0"/>
               <a:cs typeface="Arial Black" charset="0"/>
@@ -3830,7 +3716,7 @@
           </a:p>
           <a:p>
             <a:r>
-              <a:rPr lang="en-US" sz="2000" dirty="0" smtClean="0">
+              <a:rPr lang="en-US" sz="2000" dirty="0">
                 <a:latin typeface="Arial Black" charset="0"/>
                 <a:ea typeface="Arial Black" charset="0"/>
                 <a:cs typeface="Arial Black" charset="0"/>
@@ -3838,14 +3724,14 @@
               </a:rPr>
               <a:t>Data</a:t>
             </a:r>
-            <a:endParaRPr lang="en-US" sz="2000" dirty="0" smtClean="0">
+            <a:endParaRPr lang="en-US" sz="2000" dirty="0">
               <a:latin typeface="Arial Black" charset="0"/>
               <a:ea typeface="Arial Black" charset="0"/>
               <a:cs typeface="Arial Black" charset="0"/>
             </a:endParaRPr>
           </a:p>
           <a:p>
-            <a:endParaRPr lang="en-US" sz="2000" dirty="0" smtClean="0">
+            <a:endParaRPr lang="en-US" sz="2000" dirty="0">
               <a:latin typeface="Arial Black" charset="0"/>
               <a:ea typeface="Arial Black" charset="0"/>
               <a:cs typeface="Arial Black" charset="0"/>
@@ -3853,7 +3739,7 @@
           </a:p>
           <a:p>
             <a:r>
-              <a:rPr lang="en-US" sz="2000" dirty="0" smtClean="0">
+              <a:rPr lang="en-US" sz="2000" dirty="0">
                 <a:latin typeface="Arial Black" charset="0"/>
                 <a:ea typeface="Arial Black" charset="0"/>
                 <a:cs typeface="Arial Black" charset="0"/>
@@ -3861,14 +3747,14 @@
               </a:rPr>
               <a:t>Youtube</a:t>
             </a:r>
-            <a:endParaRPr lang="en-US" sz="2000" dirty="0" smtClean="0">
+            <a:endParaRPr lang="en-US" sz="2000" dirty="0">
               <a:latin typeface="Arial Black" charset="0"/>
               <a:ea typeface="Arial Black" charset="0"/>
               <a:cs typeface="Arial Black" charset="0"/>
             </a:endParaRPr>
           </a:p>
           <a:p>
-            <a:endParaRPr lang="en-US" dirty="0" smtClean="0">
+            <a:endParaRPr lang="en-US" dirty="0">
               <a:latin typeface="Arial Black" charset="0"/>
               <a:ea typeface="Arial Black" charset="0"/>
               <a:cs typeface="Arial Black" charset="0"/>
@@ -3876,7 +3762,7 @@
           </a:p>
           <a:p>
             <a:r>
-              <a:rPr lang="en-US" sz="2000" dirty="0" smtClean="0">
+              <a:rPr lang="en-US" sz="2000" dirty="0">
                 <a:latin typeface="Arial Black" charset="0"/>
                 <a:ea typeface="Arial Black" charset="0"/>
                 <a:cs typeface="Arial Black" charset="0"/>
@@ -3884,7 +3770,7 @@
               </a:rPr>
               <a:t>Code</a:t>
             </a:r>
-            <a:endParaRPr lang="en-US" sz="2000" dirty="0" smtClean="0">
+            <a:endParaRPr lang="en-US" sz="2000" dirty="0">
               <a:latin typeface="Arial Black" charset="0"/>
               <a:ea typeface="Arial Black" charset="0"/>
               <a:cs typeface="Arial Black" charset="0"/>
@@ -3903,13 +3789,6 @@
   <p:clrMapOvr>
     <a:masterClrMapping/>
   </p:clrMapOvr>
-  <p:timing>
-    <p:tnLst>
-      <p:par>
-        <p:cTn id="1" dur="indefinite" restart="never" nodeType="tmRoot"/>
-      </p:par>
-    </p:tnLst>
-  </p:timing>
 </p:sld>
 </file>
 
@@ -3953,18 +3832,13 @@
           <a:lstStyle/>
           <a:p>
             <a:r>
-              <a:rPr lang="en-US" sz="4000" dirty="0" smtClean="0">
+              <a:rPr lang="en-US" sz="4000" dirty="0">
                 <a:latin typeface="Arial Black" charset="0"/>
                 <a:ea typeface="Arial Black" charset="0"/>
                 <a:cs typeface="Arial Black" charset="0"/>
               </a:rPr>
               <a:t>[2019]</a:t>
             </a:r>
-            <a:endParaRPr lang="en-US" sz="4000" dirty="0">
-              <a:latin typeface="Arial Black" charset="0"/>
-              <a:ea typeface="Arial Black" charset="0"/>
-              <a:cs typeface="Arial Black" charset="0"/>
-            </a:endParaRPr>
           </a:p>
         </p:txBody>
       </p:sp>
